--- a/vystuplenie-itk/download/nikita-prezentaciya.pptx
+++ b/vystuplenie-itk/download/nikita-prezentaciya.pptx
@@ -4965,7 +4965,7 @@
                 </a:solidFill>
                 <a:latin typeface="Arial"/>
               </a:rPr>
-              <a:t>тема 16  ·  вошли последними</a:t>
+              <a:t>вошли последними</a:t>
             </a:r>
           </a:p>
         </p:txBody>
